--- a/Introduccion a la Ingenieria/Clases/Clase 5 - El rol del ingeniero en el contexto ambiental/Presentacion.pptx
+++ b/Introduccion a la Ingenieria/Clases/Clase 5 - El rol del ingeniero en el contexto ambiental/Presentacion.pptx
@@ -10657,7 +10657,7 @@
                 </a:solidFill>
                 <a:latin typeface="Calibri"/>
               </a:rPr>
-              <a:t>–   «Le metemos IA» a una función que resolvía un `if`.</a:t>
+              <a:t>–   «Le metemos IA» a una función que resolvía un «if».</a:t>
             </a:r>
           </a:p>
         </p:txBody>
@@ -10917,7 +10917,7 @@
                 </a:solidFill>
                 <a:latin typeface="Calibri"/>
               </a:rPr>
-              <a:t>–   Se usa el `if`. </a:t>
+              <a:t>–   Se usa el «if». </a:t>
             </a:r>
             <a:r>
               <a:rPr sz="1300" b="1" i="0">

--- a/Introduccion a la Ingenieria/Clases/Clase 5 - El rol del ingeniero en el contexto ambiental/Presentacion.pptx
+++ b/Introduccion a la Ingenieria/Clases/Clase 5 - El rol del ingeniero en el contexto ambiental/Presentacion.pptx
@@ -6483,7 +6483,7 @@
               </a:spcAft>
             </a:pPr>
             <a:r>
-              <a:rPr sz="1600" b="0" i="0">
+              <a:rPr sz="2000" b="0" i="0">
                 <a:solidFill>
                   <a:srgbClr val="333333"/>
                 </a:solidFill>
@@ -6492,7 +6492,7 @@
               <a:t>–   </a:t>
             </a:r>
             <a:r>
-              <a:rPr sz="1600" b="1" i="0">
+              <a:rPr sz="2000" b="1" i="0">
                 <a:solidFill>
                   <a:srgbClr val="333333"/>
                 </a:solidFill>
@@ -6501,7 +6501,7 @@
               <a:t>Trabajo dirigido:</a:t>
             </a:r>
             <a:r>
-              <a:rPr sz="1600" b="0" i="0">
+              <a:rPr sz="2000" b="0" i="0">
                 <a:solidFill>
                   <a:srgbClr val="333333"/>
                 </a:solidFill>
@@ -6517,7 +6517,7 @@
               </a:spcAft>
             </a:pPr>
             <a:r>
-              <a:rPr sz="1600" b="0" i="0">
+              <a:rPr sz="2000" b="0" i="0">
                 <a:solidFill>
                   <a:srgbClr val="333333"/>
                 </a:solidFill>
@@ -6526,7 +6526,7 @@
               <a:t>–   </a:t>
             </a:r>
             <a:r>
-              <a:rPr sz="1600" b="1" i="0">
+              <a:rPr sz="2000" b="1" i="0">
                 <a:solidFill>
                   <a:srgbClr val="333333"/>
                 </a:solidFill>
@@ -6535,7 +6535,7 @@
               <a:t>Trabajo independiente:</a:t>
             </a:r>
             <a:r>
-              <a:rPr sz="1600" b="0" i="0">
+              <a:rPr sz="2000" b="0" i="0">
                 <a:solidFill>
                   <a:srgbClr val="333333"/>
                 </a:solidFill>
@@ -6551,7 +6551,7 @@
               </a:spcAft>
             </a:pPr>
             <a:r>
-              <a:rPr sz="1600" b="0" i="0">
+              <a:rPr sz="2000" b="0" i="0">
                 <a:solidFill>
                   <a:srgbClr val="333333"/>
                 </a:solidFill>
@@ -6560,7 +6560,7 @@
               <a:t>–   </a:t>
             </a:r>
             <a:r>
-              <a:rPr sz="1600" b="1" i="0">
+              <a:rPr sz="2000" b="1" i="0">
                 <a:solidFill>
                   <a:srgbClr val="333333"/>
                 </a:solidFill>
@@ -6569,7 +6569,7 @@
               <a:t>Sesión 6 · Análisis de problemas tecnológicos del entorno</a:t>
             </a:r>
             <a:r>
-              <a:rPr sz="1600" b="0" i="0">
+              <a:rPr sz="2000" b="0" i="0">
                 <a:solidFill>
                   <a:srgbClr val="333333"/>
                 </a:solidFill>
@@ -6578,7 +6578,7 @@
               <a:t> — </a:t>
             </a:r>
             <a:r>
-              <a:rPr sz="1600" b="1" i="0">
+              <a:rPr sz="2000" b="1" i="0">
                 <a:solidFill>
                   <a:srgbClr val="333333"/>
                 </a:solidFill>
@@ -6587,7 +6587,7 @@
               <a:t>cierra el corte 1</a:t>
             </a:r>
             <a:r>
-              <a:rPr sz="1600" b="0" i="0">
+              <a:rPr sz="2000" b="0" i="0">
                 <a:solidFill>
                   <a:srgbClr val="333333"/>
                 </a:solidFill>
@@ -6603,7 +6603,7 @@
               </a:spcAft>
             </a:pPr>
             <a:r>
-              <a:rPr sz="1600" b="0" i="0">
+              <a:rPr sz="2000" b="0" i="0">
                 <a:solidFill>
                   <a:srgbClr val="333333"/>
                 </a:solidFill>
@@ -6612,7 +6612,7 @@
               <a:t>–   </a:t>
             </a:r>
             <a:r>
-              <a:rPr sz="1600" b="1" i="0">
+              <a:rPr sz="2000" b="1" i="0">
                 <a:solidFill>
                   <a:srgbClr val="333333"/>
                 </a:solidFill>
@@ -6621,7 +6621,7 @@
               <a:t>Aviso:</a:t>
             </a:r>
             <a:r>
-              <a:rPr sz="1600" b="0" i="0">
+              <a:rPr sz="2000" b="0" i="0">
                 <a:solidFill>
                   <a:srgbClr val="333333"/>
                 </a:solidFill>
@@ -6630,7 +6630,7 @@
               <a:t> La sesión 6 cierra el corte. Traigan </a:t>
             </a:r>
             <a:r>
-              <a:rPr sz="1600" b="1" i="0">
+              <a:rPr sz="2000" b="1" i="0">
                 <a:solidFill>
                   <a:srgbClr val="333333"/>
                 </a:solidFill>
@@ -6639,7 +6639,7 @@
               <a:t>el problema de la sesión 1, la ficha de sistema de la sesión 3, la regla ética de la sesión 4 y el indicador de hoy</a:t>
             </a:r>
             <a:r>
-              <a:rPr sz="1600" b="0" i="0">
+              <a:rPr sz="2000" b="0" i="0">
                 <a:solidFill>
                   <a:srgbClr val="333333"/>
                 </a:solidFill>
@@ -6648,7 +6648,7 @@
               <a:t>: la ficha del problema se arma con esas cuatro cosas y se entrega en clase. Y lean el documento </a:t>
             </a:r>
             <a:r>
-              <a:rPr sz="1600" b="1" i="0">
+              <a:rPr sz="2000" b="1" i="0">
                 <a:solidFill>
                   <a:srgbClr val="333333"/>
                 </a:solidFill>
@@ -6657,7 +6657,7 @@
               <a:t>«Evaluación del Corte 1 — cómo prepararse»</a:t>
             </a:r>
             <a:r>
-              <a:rPr sz="1600" b="0" i="0">
+              <a:rPr sz="2000" b="0" i="0">
                 <a:solidFill>
                   <a:srgbClr val="333333"/>
                 </a:solidFill>
@@ -6673,7 +6673,7 @@
               </a:spcAft>
             </a:pPr>
             <a:r>
-              <a:rPr sz="1600" b="0" i="0">
+              <a:rPr sz="2000" b="0" i="0">
                 <a:solidFill>
                   <a:srgbClr val="333333"/>
                 </a:solidFill>
@@ -6682,7 +6682,7 @@
               <a:t>–   </a:t>
             </a:r>
             <a:r>
-              <a:rPr sz="1600" b="1" i="0">
+              <a:rPr sz="2000" b="1" i="0">
                 <a:solidFill>
                   <a:srgbClr val="333333"/>
                 </a:solidFill>
@@ -6691,7 +6691,7 @@
               <a:t>Antes de salir:</a:t>
             </a:r>
             <a:r>
-              <a:rPr sz="1600" b="0" i="0">
+              <a:rPr sz="2000" b="0" i="0">
                 <a:solidFill>
                   <a:srgbClr val="333333"/>
                 </a:solidFill>
@@ -7265,7 +7265,7 @@
         <p:spPr>
           <a:xfrm>
             <a:off x="502920" y="2798064"/>
-            <a:ext cx="2164019" cy="2560320"/>
+            <a:ext cx="2164019" cy="3099816"/>
           </a:xfrm>
           <a:prstGeom prst="rect">
             <a:avLst/>
@@ -7380,7 +7380,7 @@
         <p:spPr>
           <a:xfrm>
             <a:off x="2758379" y="2798064"/>
-            <a:ext cx="2164019" cy="2560320"/>
+            <a:ext cx="2164019" cy="3099816"/>
           </a:xfrm>
           <a:prstGeom prst="rect">
             <a:avLst/>
@@ -7495,7 +7495,7 @@
         <p:spPr>
           <a:xfrm>
             <a:off x="5013838" y="2798064"/>
-            <a:ext cx="2164019" cy="2560320"/>
+            <a:ext cx="2164019" cy="3099816"/>
           </a:xfrm>
           <a:prstGeom prst="rect">
             <a:avLst/>
@@ -7610,7 +7610,7 @@
         <p:spPr>
           <a:xfrm>
             <a:off x="7269297" y="2798064"/>
-            <a:ext cx="2164019" cy="2560320"/>
+            <a:ext cx="2164019" cy="3099816"/>
           </a:xfrm>
           <a:prstGeom prst="rect">
             <a:avLst/>
@@ -7725,7 +7725,7 @@
         <p:spPr>
           <a:xfrm>
             <a:off x="9524756" y="2798064"/>
-            <a:ext cx="2164019" cy="2560320"/>
+            <a:ext cx="2164019" cy="3099816"/>
           </a:xfrm>
           <a:prstGeom prst="rect">
             <a:avLst/>
@@ -7759,8 +7759,8 @@
         </p:nvSpPr>
         <p:spPr>
           <a:xfrm>
-            <a:off x="457200" y="5943600"/>
-            <a:ext cx="11277295" cy="365760"/>
+            <a:off x="457200" y="5806440"/>
+            <a:ext cx="11277295" cy="640080"/>
           </a:xfrm>
           <a:prstGeom prst="rect">
             <a:avLst/>
@@ -8013,7 +8013,7 @@
               </a:spcAft>
             </a:pPr>
             <a:r>
-              <a:rPr sz="1600" b="0" i="0">
+              <a:rPr sz="2000" b="0" i="0">
                 <a:solidFill>
                   <a:srgbClr val="333333"/>
                 </a:solidFill>
@@ -8022,7 +8022,7 @@
               <a:t>–   Nombrar las </a:t>
             </a:r>
             <a:r>
-              <a:rPr sz="1600" b="1" i="0">
+              <a:rPr sz="2000" b="1" i="0">
                 <a:solidFill>
                   <a:srgbClr val="333333"/>
                 </a:solidFill>
@@ -8031,7 +8031,7 @@
               <a:t>cuatro etapas</a:t>
             </a:r>
             <a:r>
-              <a:rPr sz="1600" b="0" i="0">
+              <a:rPr sz="2000" b="0" i="0">
                 <a:solidFill>
                   <a:srgbClr val="333333"/>
                 </a:solidFill>
@@ -8047,7 +8047,7 @@
               </a:spcAft>
             </a:pPr>
             <a:r>
-              <a:rPr sz="1600" b="0" i="0">
+              <a:rPr sz="2000" b="0" i="0">
                 <a:solidFill>
                   <a:srgbClr val="333333"/>
                 </a:solidFill>
@@ -8056,7 +8056,7 @@
               <a:t>–   Explicar qué mide el </a:t>
             </a:r>
             <a:r>
-              <a:rPr sz="1600" b="1" i="0">
+              <a:rPr sz="2000" b="1" i="0">
                 <a:solidFill>
                   <a:srgbClr val="333333"/>
                 </a:solidFill>
@@ -8065,7 +8065,7 @@
               <a:t>PUE</a:t>
             </a:r>
             <a:r>
-              <a:rPr sz="1600" b="0" i="0">
+              <a:rPr sz="2000" b="0" i="0">
                 <a:solidFill>
                   <a:srgbClr val="333333"/>
                 </a:solidFill>
@@ -8081,7 +8081,7 @@
               </a:spcAft>
             </a:pPr>
             <a:r>
-              <a:rPr sz="1600" b="0" i="0">
+              <a:rPr sz="2000" b="0" i="0">
                 <a:solidFill>
                   <a:srgbClr val="333333"/>
                 </a:solidFill>
@@ -8090,7 +8090,7 @@
               <a:t>–   Relacionar una decisión de diseño con un </a:t>
             </a:r>
             <a:r>
-              <a:rPr sz="1600" b="1" i="0">
+              <a:rPr sz="2000" b="1" i="0">
                 <a:solidFill>
                   <a:srgbClr val="333333"/>
                 </a:solidFill>
@@ -8099,7 +8099,7 @@
               <a:t>efecto ambiental medible</a:t>
             </a:r>
             <a:r>
-              <a:rPr sz="1600" b="0" i="0">
+              <a:rPr sz="2000" b="0" i="0">
                 <a:solidFill>
                   <a:srgbClr val="333333"/>
                 </a:solidFill>
@@ -8115,7 +8115,7 @@
               </a:spcAft>
             </a:pPr>
             <a:r>
-              <a:rPr sz="1600" b="0" i="0">
+              <a:rPr sz="2000" b="0" i="0">
                 <a:solidFill>
                   <a:srgbClr val="333333"/>
                 </a:solidFill>
@@ -8124,7 +8124,7 @@
               <a:t>–   Nombrar la norma colombiana de </a:t>
             </a:r>
             <a:r>
-              <a:rPr sz="1600" b="1" i="0">
+              <a:rPr sz="2000" b="1" i="0">
                 <a:solidFill>
                   <a:srgbClr val="333333"/>
                 </a:solidFill>
@@ -8133,7 +8133,7 @@
               <a:t>residuos electrónicos</a:t>
             </a:r>
             <a:r>
-              <a:rPr sz="1600" b="0" i="0">
+              <a:rPr sz="2000" b="0" i="0">
                 <a:solidFill>
                   <a:srgbClr val="333333"/>
                 </a:solidFill>
@@ -10587,7 +10587,7 @@
               </a:spcAft>
             </a:pPr>
             <a:r>
-              <a:rPr sz="1300" b="0" i="0">
+              <a:rPr sz="1500" b="0" i="0">
                 <a:solidFill>
                   <a:srgbClr val="333333"/>
                 </a:solidFill>
@@ -10603,7 +10603,7 @@
               </a:spcAft>
             </a:pPr>
             <a:r>
-              <a:rPr sz="1300" b="0" i="0">
+              <a:rPr sz="1500" b="0" i="0">
                 <a:solidFill>
                   <a:srgbClr val="333333"/>
                 </a:solidFill>
@@ -10619,7 +10619,7 @@
               </a:spcAft>
             </a:pPr>
             <a:r>
-              <a:rPr sz="1300" b="0" i="0">
+              <a:rPr sz="1500" b="0" i="0">
                 <a:solidFill>
                   <a:srgbClr val="333333"/>
                 </a:solidFill>
@@ -10635,7 +10635,7 @@
               </a:spcAft>
             </a:pPr>
             <a:r>
-              <a:rPr sz="1300" b="0" i="0">
+              <a:rPr sz="1500" b="0" i="0">
                 <a:solidFill>
                   <a:srgbClr val="333333"/>
                 </a:solidFill>
@@ -10651,7 +10651,7 @@
               </a:spcAft>
             </a:pPr>
             <a:r>
-              <a:rPr sz="1300" b="0" i="0">
+              <a:rPr sz="1500" b="0" i="0">
                 <a:solidFill>
                   <a:srgbClr val="333333"/>
                 </a:solidFill>
@@ -10811,7 +10811,7 @@
               </a:spcAft>
             </a:pPr>
             <a:r>
-              <a:rPr sz="1300" b="0" i="0">
+              <a:rPr sz="1500" b="0" i="0">
                 <a:solidFill>
                   <a:srgbClr val="333333"/>
                 </a:solidFill>
@@ -10820,7 +10820,7 @@
               <a:t>–   Cada 5 minutos, o cuando el usuario se mueve. </a:t>
             </a:r>
             <a:r>
-              <a:rPr sz="1300" b="1" i="0">
+              <a:rPr sz="1500" b="1" i="0">
                 <a:solidFill>
                   <a:srgbClr val="333333"/>
                 </a:solidFill>
@@ -10836,7 +10836,7 @@
               </a:spcAft>
             </a:pPr>
             <a:r>
-              <a:rPr sz="1300" b="0" i="0">
+              <a:rPr sz="1500" b="0" i="0">
                 <a:solidFill>
                   <a:srgbClr val="333333"/>
                 </a:solidFill>
@@ -10845,7 +10845,7 @@
               <a:t>–   Imágenes ajustadas al tamaño real. </a:t>
             </a:r>
             <a:r>
-              <a:rPr sz="1300" b="1" i="0">
+              <a:rPr sz="1500" b="1" i="0">
                 <a:solidFill>
                   <a:srgbClr val="333333"/>
                 </a:solidFill>
@@ -10861,7 +10861,7 @@
               </a:spcAft>
             </a:pPr>
             <a:r>
-              <a:rPr sz="1300" b="0" i="0">
+              <a:rPr sz="1500" b="0" i="0">
                 <a:solidFill>
                   <a:srgbClr val="333333"/>
                 </a:solidFill>
@@ -10870,7 +10870,7 @@
               <a:t>–   Se guarda el resultado y se recalcula al cambiar. </a:t>
             </a:r>
             <a:r>
-              <a:rPr sz="1300" b="1" i="0">
+              <a:rPr sz="1500" b="1" i="0">
                 <a:solidFill>
                   <a:srgbClr val="333333"/>
                 </a:solidFill>
@@ -10886,7 +10886,7 @@
               </a:spcAft>
             </a:pPr>
             <a:r>
-              <a:rPr sz="1300" b="0" i="0">
+              <a:rPr sz="1500" b="0" i="0">
                 <a:solidFill>
                   <a:srgbClr val="333333"/>
                 </a:solidFill>
@@ -10895,7 +10895,7 @@
               <a:t>–   Se sostiene el soporte para dispositivos viejos. </a:t>
             </a:r>
             <a:r>
-              <a:rPr sz="1300" b="1" i="0">
+              <a:rPr sz="1500" b="1" i="0">
                 <a:solidFill>
                   <a:srgbClr val="333333"/>
                 </a:solidFill>
@@ -10911,7 +10911,7 @@
               </a:spcAft>
             </a:pPr>
             <a:r>
-              <a:rPr sz="1300" b="0" i="0">
+              <a:rPr sz="1500" b="0" i="0">
                 <a:solidFill>
                   <a:srgbClr val="333333"/>
                 </a:solidFill>
@@ -10920,7 +10920,7 @@
               <a:t>–   Se usa el «if». </a:t>
             </a:r>
             <a:r>
-              <a:rPr sz="1300" b="1" i="0">
+              <a:rPr sz="1500" b="1" i="0">
                 <a:solidFill>
                   <a:srgbClr val="333333"/>
                 </a:solidFill>
@@ -11140,7 +11140,7 @@
               </a:spcAft>
             </a:pPr>
             <a:r>
-              <a:rPr sz="1300" b="0" i="0">
+              <a:rPr sz="2000" b="0" i="0">
                 <a:solidFill>
                   <a:srgbClr val="333333"/>
                 </a:solidFill>
@@ -11149,7 +11149,7 @@
               <a:t>–   </a:t>
             </a:r>
             <a:r>
-              <a:rPr sz="1300" b="1" i="0">
+              <a:rPr sz="2000" b="1" i="0">
                 <a:solidFill>
                   <a:srgbClr val="333333"/>
                 </a:solidFill>
@@ -11158,7 +11158,7 @@
               <a:t>La matriz eléctrica.</a:t>
             </a:r>
             <a:r>
-              <a:rPr sz="1300" b="0" i="0">
+              <a:rPr sz="2000" b="0" i="0">
                 <a:solidFill>
                   <a:srgbClr val="333333"/>
                 </a:solidFill>
@@ -11167,7 +11167,7 @@
               <a:t> Buena parte de la generación del país es </a:t>
             </a:r>
             <a:r>
-              <a:rPr sz="1300" b="1" i="0">
+              <a:rPr sz="2000" b="1" i="0">
                 <a:solidFill>
                   <a:srgbClr val="333333"/>
                 </a:solidFill>
@@ -11176,7 +11176,7 @@
               <a:t>hidráulica</a:t>
             </a:r>
             <a:r>
-              <a:rPr sz="1300" b="0" i="0">
+              <a:rPr sz="2000" b="0" i="0">
                 <a:solidFill>
                   <a:srgbClr val="333333"/>
                 </a:solidFill>
@@ -11185,7 +11185,7 @@
               <a:t>, así que un kilovatio-hora consumido en Colombia tiene menos emisiones asociadas que el mismo kilovatio en un país que quema carbón. Un análisis serio no copia cifras de emisiones de otro país: </a:t>
             </a:r>
             <a:r>
-              <a:rPr sz="1300" b="1" i="0">
+              <a:rPr sz="2000" b="1" i="0">
                 <a:solidFill>
                   <a:srgbClr val="333333"/>
                 </a:solidFill>
@@ -11194,7 +11194,7 @@
               <a:t>usa el factor local</a:t>
             </a:r>
             <a:r>
-              <a:rPr sz="1300" b="0" i="0">
+              <a:rPr sz="2000" b="0" i="0">
                 <a:solidFill>
                   <a:srgbClr val="333333"/>
                 </a:solidFill>
@@ -11210,7 +11210,7 @@
               </a:spcAft>
             </a:pPr>
             <a:r>
-              <a:rPr sz="1300" b="0" i="0">
+              <a:rPr sz="2000" b="0" i="0">
                 <a:solidFill>
                   <a:srgbClr val="333333"/>
                 </a:solidFill>
@@ -11219,7 +11219,7 @@
               <a:t>–   </a:t>
             </a:r>
             <a:r>
-              <a:rPr sz="1300" b="1" i="0">
+              <a:rPr sz="2000" b="1" i="0">
                 <a:solidFill>
                   <a:srgbClr val="333333"/>
                 </a:solidFill>
@@ -11228,7 +11228,7 @@
               <a:t>Y su contracara.</a:t>
             </a:r>
             <a:r>
-              <a:rPr sz="1300" b="0" i="0">
+              <a:rPr sz="2000" b="0" i="0">
                 <a:solidFill>
                   <a:srgbClr val="333333"/>
                 </a:solidFill>
@@ -11237,7 +11237,7 @@
               <a:t> Cuando llega el fenómeno de El Niño y baja el nivel de los embalses, entran las plantas térmicas y </a:t>
             </a:r>
             <a:r>
-              <a:rPr sz="1300" b="1" i="0">
+              <a:rPr sz="2000" b="1" i="0">
                 <a:solidFill>
                   <a:srgbClr val="333333"/>
                 </a:solidFill>
@@ -11246,7 +11246,7 @@
               <a:t>la misma aplicación pasa a emitir más sin cambiar una línea de código</a:t>
             </a:r>
             <a:r>
-              <a:rPr sz="1300" b="0" i="0">
+              <a:rPr sz="2000" b="0" i="0">
                 <a:solidFill>
                   <a:srgbClr val="333333"/>
                 </a:solidFill>
@@ -11262,7 +11262,7 @@
               </a:spcAft>
             </a:pPr>
             <a:r>
-              <a:rPr sz="1300" b="0" i="0">
+              <a:rPr sz="2000" b="0" i="0">
                 <a:solidFill>
                   <a:srgbClr val="333333"/>
                 </a:solidFill>
@@ -11271,7 +11271,7 @@
               <a:t>–   </a:t>
             </a:r>
             <a:r>
-              <a:rPr sz="1300" b="1" i="0">
+              <a:rPr sz="2000" b="1" i="0">
                 <a:solidFill>
                   <a:srgbClr val="333333"/>
                 </a:solidFill>
@@ -11280,7 +11280,7 @@
               <a:t>Residuos electrónicos.</a:t>
             </a:r>
             <a:r>
-              <a:rPr sz="1300" b="0" i="0">
+              <a:rPr sz="2000" b="0" i="0">
                 <a:solidFill>
                   <a:srgbClr val="333333"/>
                 </a:solidFill>
@@ -11289,7 +11289,7 @@
               <a:t> La </a:t>
             </a:r>
             <a:r>
-              <a:rPr sz="1300" b="1" i="0">
+              <a:rPr sz="2000" b="1" i="0">
                 <a:solidFill>
                   <a:srgbClr val="333333"/>
                 </a:solidFill>
@@ -11298,7 +11298,7 @@
               <a:t>Ley 1672 de 2013</a:t>
             </a:r>
             <a:r>
-              <a:rPr sz="1300" b="0" i="0">
+              <a:rPr sz="2000" b="0" i="0">
                 <a:solidFill>
                   <a:srgbClr val="333333"/>
                 </a:solidFill>
@@ -11307,7 +11307,7 @@
               <a:t> fija los lineamientos de los RAEE en Colombia: el productor tiene que ofrecer puntos de recolección y el usuario tiene el deber de usarlos. Los informes internacionales (Global E-waste Monitor) muestran que </a:t>
             </a:r>
             <a:r>
-              <a:rPr sz="1300" b="1" i="0">
+              <a:rPr sz="2000" b="1" i="0">
                 <a:solidFill>
                   <a:srgbClr val="333333"/>
                 </a:solidFill>
@@ -11316,7 +11316,7 @@
               <a:t>la mayor parte del residuo electrónico del mundo no se recoge formalmente</a:t>
             </a:r>
             <a:r>
-              <a:rPr sz="1300" b="0" i="0">
+              <a:rPr sz="2000" b="0" i="0">
                 <a:solidFill>
                   <a:srgbClr val="333333"/>
                 </a:solidFill>
@@ -11332,7 +11332,7 @@
               </a:spcAft>
             </a:pPr>
             <a:r>
-              <a:rPr sz="1300" b="0" i="0">
+              <a:rPr sz="2000" b="0" i="0">
                 <a:solidFill>
                   <a:srgbClr val="333333"/>
                 </a:solidFill>
@@ -11341,7 +11341,7 @@
               <a:t>–   </a:t>
             </a:r>
             <a:r>
-              <a:rPr sz="1300" b="1" i="0">
+              <a:rPr sz="2000" b="1" i="0">
                 <a:solidFill>
                   <a:srgbClr val="333333"/>
                 </a:solidFill>
@@ -11350,7 +11350,7 @@
               <a:t>Consecuencia práctica para su proyecto:</a:t>
             </a:r>
             <a:r>
-              <a:rPr sz="1300" b="0" i="0">
+              <a:rPr sz="2000" b="0" i="0">
                 <a:solidFill>
                   <a:srgbClr val="333333"/>
                 </a:solidFill>
@@ -11359,7 +11359,7 @@
               <a:t> la decisión ambiental más fuerte que puede tomar un equipo de este curso casi nunca es «consumir menos batería». Es </a:t>
             </a:r>
             <a:r>
-              <a:rPr sz="1300" b="1" i="0">
+              <a:rPr sz="2000" b="1" i="0">
                 <a:solidFill>
                   <a:srgbClr val="333333"/>
                 </a:solidFill>
@@ -11368,7 +11368,7 @@
               <a:t>no obligar a cambiar de aparato</a:t>
             </a:r>
             <a:r>
-              <a:rPr sz="1300" b="0" i="0">
+              <a:rPr sz="2000" b="0" i="0">
                 <a:solidFill>
                   <a:srgbClr val="333333"/>
                 </a:solidFill>
@@ -11377,7 +11377,7 @@
               <a:t> y </a:t>
             </a:r>
             <a:r>
-              <a:rPr sz="1300" b="1" i="0">
+              <a:rPr sz="2000" b="1" i="0">
                 <a:solidFill>
                   <a:srgbClr val="333333"/>
                 </a:solidFill>
@@ -11386,7 +11386,7 @@
               <a:t>no mover datos que no hacen falta</a:t>
             </a:r>
             <a:r>
-              <a:rPr sz="1300" b="0" i="0">
+              <a:rPr sz="2000" b="0" i="0">
                 <a:solidFill>
                   <a:srgbClr val="333333"/>
                 </a:solidFill>

--- a/Introduccion a la Ingenieria/Clases/Clase 5 - El rol del ingeniero en el contexto ambiental/Presentacion.pptx
+++ b/Introduccion a la Ingenieria/Clases/Clase 5 - El rol del ingeniero en el contexto ambiental/Presentacion.pptx
@@ -6593,7 +6593,7 @@
                 </a:solidFill>
                 <a:latin typeface="Calibri"/>
               </a:rPr>
-              <a:t>: se arma la ficha del problema del proyecto del semestre y hay evaluación de corte en ExamLab al final de la sesión.</a:t>
+              <a:t>: se arma la ficha del problema del proyecto del semestre y hay evaluación de corte en la plataforma del curso al final de la sesión.</a:t>
             </a:r>
           </a:p>
           <a:p>

--- a/Introduccion a la Ingenieria/Clases/Clase 5 - El rol del ingeniero en el contexto ambiental/Presentacion.pptx
+++ b/Introduccion a la Ingenieria/Clases/Clase 5 - El rol del ingeniero en el contexto ambiental/Presentacion.pptx
@@ -6450,7 +6450,7 @@
                 </a:solidFill>
                 <a:latin typeface="Calibri"/>
               </a:rPr>
-              <a:t>Para la sesión 6</a:t>
+              <a:t>Para la Clase 6</a:t>
             </a:r>
           </a:p>
         </p:txBody>
@@ -6566,7 +6566,7 @@
                 </a:solidFill>
                 <a:latin typeface="Calibri"/>
               </a:rPr>
-              <a:t>Sesión 6 · Análisis de problemas tecnológicos del entorno</a:t>
+              <a:t>Clase 6 · Análisis de problemas tecnológicos del entorno</a:t>
             </a:r>
             <a:r>
               <a:rPr sz="2000" b="0" i="0">
